--- a/CareVerify_AI_Presentation.pptx
+++ b/CareVerify_AI_Presentation.pptx
@@ -5519,7 +5519,7 @@
                 <a:cs typeface="Calibri"/>
                 <a:sym typeface="Calibri"/>
               </a:rPr>
-              <a:t>Abhishek Darji  ·  MSAI, San Jose State University  ·  Cotiviti Intern Assessment  ·  June 2026</a:t>
+              <a:t>Abhishek Darji  ·  San Jose State University  ·  Cotiviti Intern Assessment  ·  June 2026</a:t>
             </a:r>
             <a:endParaRPr b="0" i="0" sz="1100" u="none" cap="none" strike="noStrike">
               <a:solidFill>
@@ -10892,7 +10892,7 @@
             <a:tbl>
               <a:tblPr>
                 <a:noFill/>
-                <a:tableStyleId>{7F3A8A7C-7D4B-4BD7-A1C6-95CDD0046C1A}</a:tableStyleId>
+                <a:tableStyleId>{EBD5B22E-A7D2-4EF6-BE32-07DA07221662}</a:tableStyleId>
               </a:tblPr>
               <a:tblGrid>
                 <a:gridCol w="1005850"/>
